--- a/BookVerse_Project_Presentation.pptx
+++ b/BookVerse_Project_Presentation.pptx
@@ -3136,7 +3136,21 @@
           <a:bodyPr rtlCol="0" anchor="ctr"/>
           <a:lstStyle/>
           <a:p>
-            <a:pPr algn="ctr"/>
+            <a:pPr algn="ctr">
+              <a:defRPr sz="1300">
+                <a:solidFill>
+                  <a:srgbClr val="94A3B8"/>
+                </a:solidFill>
+                <a:latin typeface="Segoe UI"/>
+              </a:defRPr>
+            </a:pPr>
+            <a:r>
+              <a:t>AUTHOR: J. SAI SATYAN</a:t>
+            </a:r>
+            <a:br/>
+            <a:r>
+              <a:t>PROJECT GUIDE: Dr. K. V. Ramanathan  |  SECTION: S-14 (CSE)</a:t>
+            </a:r>
           </a:p>
         </p:txBody>
       </p:sp>
@@ -3230,26 +3244,6 @@
                 </a:solidFill>
               </a:defRPr>
             </a:pPr>
-            <a:r>
-              <a:t>TEAM MEMBERS:</a:t>
-            </a:r>
-            <a:br/>
-            <a:r>
-              <a:t>• J. SAI SATYAN  (Roll No: 2520030088)</a:t>
-            </a:r>
-            <a:br/>
-            <a:r>
-              <a:t>• M. TANMAYEE   (Roll No: 2520030339)</a:t>
-            </a:r>
-            <a:br/>
-            <a:r>
-              <a:t>• K. DEVIKA     (Roll No: 2520030329)</a:t>
-            </a:r>
-            <a:br/>
-            <a:br/>
-            <a:r>
-              <a:t>PROJECT GUIDE: Dr. K. V. Ramanathan  |  SECTION: S-14 (CSE)</a:t>
-            </a:r>
           </a:p>
         </p:txBody>
       </p:sp>
